--- a/media/resources/files/4-Amal_-_BagyttalganSandarBingo.pptx
+++ b/media/resources/files/4-Amal_-_BagyttalganSandarBingo.pptx
@@ -17327,7 +17327,7 @@
             </a:pPr>
             <a:r>
               <a:rPr lang="ru-RU" sz="3200" dirty="0"/>
-              <a:t>Турдуу пикирлер учун ыраазычылык билдиребиз.</a:t>
+              <a:t>Түрдүү пикирлер үчүн ыраазычылык билдиребиз.</a:t>
             </a:r>
           </a:p>
           <a:p>

--- a/media/resources/files/4-Amal_-_BagyttalganSandarBingo.pptx
+++ b/media/resources/files/4-Amal_-_BagyttalganSandarBingo.pptx
@@ -3464,7 +3464,7 @@
             </a:pPr>
             <a:r>
               <a:rPr lang="ru-RU" sz="2000" dirty="0"/>
-              <a:t>Окуучулар </a:t>
+              <a:t>Окуучулар тордон тогуз жоопту тандап, дептердеги 3х3 чакмакка каалагандай коюшат.</a:t>
             </a:r>
             <a:r>
               <a:rPr lang="ru-RU" sz="2400" dirty="0">
@@ -3472,7 +3472,7 @@
                   <a:srgbClr val="FF0000"/>
                 </a:solidFill>
               </a:rPr>
-              <a:t>суроо</a:t>
+              <a:t/>
             </a:r>
             <a:r>
               <a:rPr lang="en-US" sz="2400" dirty="0">
@@ -3480,7 +3480,7 @@
                   <a:srgbClr val="FF0000"/>
                 </a:solidFill>
               </a:rPr>
-              <a:t> </a:t>
+              <a:t/>
             </a:r>
             <a:r>
               <a:rPr lang="en-US" sz="2400" dirty="0" err="1">
@@ -3488,7 +3488,7 @@
                   <a:srgbClr val="FF0000"/>
                 </a:solidFill>
               </a:rPr>
-              <a:t>тордон</a:t>
+              <a:t/>
             </a:r>
             <a:r>
               <a:rPr lang="en-US" sz="2400" dirty="0">
@@ -3496,87 +3496,87 @@
                   <a:srgbClr val="FF0000"/>
                 </a:solidFill>
               </a:rPr>
-              <a:t> </a:t>
+              <a:t/>
             </a:r>
             <a:r>
               <a:rPr lang="en-US" sz="2000" dirty="0" err="1"/>
-              <a:t>тогуз</a:t>
+              <a:t/>
             </a:r>
             <a:r>
               <a:rPr lang="en-US" sz="2000" dirty="0"/>
-              <a:t> </a:t>
+              <a:t/>
             </a:r>
             <a:r>
               <a:rPr lang="en-US" sz="2000" dirty="0" err="1"/>
-              <a:t>жоопту</a:t>
+              <a:t/>
             </a:r>
             <a:r>
               <a:rPr lang="en-US" sz="2000" dirty="0"/>
-              <a:t> </a:t>
+              <a:t/>
             </a:r>
             <a:r>
               <a:rPr lang="en-US" sz="2000" dirty="0" err="1"/>
-              <a:t>тандап</a:t>
+              <a:t/>
             </a:r>
             <a:r>
               <a:rPr lang="en-US" sz="2000" dirty="0"/>
-              <a:t>, </a:t>
+              <a:t/>
             </a:r>
             <a:r>
               <a:rPr lang="en-US" sz="2000" dirty="0" err="1"/>
-              <a:t>аларды</a:t>
+              <a:t/>
             </a:r>
             <a:r>
               <a:rPr lang="en-US" sz="2000" dirty="0"/>
-              <a:t> </a:t>
+              <a:t/>
             </a:r>
             <a:r>
               <a:rPr lang="ru-RU" sz="2000" dirty="0"/>
-              <a:t>дептериндеги</a:t>
+              <a:t/>
             </a:r>
             <a:r>
               <a:rPr lang="en-US" sz="2000" dirty="0"/>
-              <a:t> 3х3 </a:t>
+              <a:t/>
             </a:r>
             <a:r>
               <a:rPr lang="en-US" sz="2000" dirty="0" err="1"/>
-              <a:t>квадратка</a:t>
+              <a:t/>
             </a:r>
             <a:r>
               <a:rPr lang="en-US" sz="2000" dirty="0"/>
-              <a:t> </a:t>
+              <a:t/>
             </a:r>
             <a:r>
               <a:rPr lang="en-US" sz="2000" dirty="0" err="1"/>
-              <a:t>туш</a:t>
+              <a:t/>
             </a:r>
             <a:r>
               <a:rPr lang="en-US" sz="2000" dirty="0"/>
-              <a:t> </a:t>
+              <a:t/>
             </a:r>
             <a:r>
               <a:rPr lang="en-US" sz="2000" dirty="0" err="1"/>
-              <a:t>келди</a:t>
+              <a:t/>
             </a:r>
             <a:r>
               <a:rPr lang="en-US" sz="2000" dirty="0"/>
-              <a:t> </a:t>
+              <a:t/>
             </a:r>
             <a:r>
               <a:rPr lang="en-US" sz="2000" dirty="0" err="1"/>
-              <a:t>жайгаштырышы</a:t>
+              <a:t/>
             </a:r>
             <a:r>
               <a:rPr lang="en-US" sz="2000" dirty="0"/>
-              <a:t> </a:t>
+              <a:t/>
             </a:r>
             <a:r>
               <a:rPr lang="en-US" sz="2000" dirty="0" err="1"/>
-              <a:t>керек</a:t>
+              <a:t/>
             </a:r>
             <a:r>
               <a:rPr lang="en-US" sz="2000" dirty="0"/>
-              <a:t>.</a:t>
+              <a:t/>
             </a:r>
           </a:p>
           <a:p>
